--- a/03-metadata/cviceni-03.pptx
+++ b/03-metadata/cviceni-03.pptx
@@ -7072,6 +7072,13 @@
               <a:schemeClr val="lt1"/>
             </a:fontRef>
           </p:style>
+          <p:txBody>
+            <a:bodyPr/>
+            <a:lstStyle/>
+            <a:p>
+              <a:endParaRPr lang="cs-CZ"/>
+            </a:p>
+          </p:txBody>
         </p:sp>
         <p:sp>
           <p:nvSpPr>
@@ -7135,6 +7142,13 @@
               <a:schemeClr val="lt1"/>
             </a:fontRef>
           </p:style>
+          <p:txBody>
+            <a:bodyPr/>
+            <a:lstStyle/>
+            <a:p>
+              <a:endParaRPr lang="cs-CZ"/>
+            </a:p>
+          </p:txBody>
         </p:sp>
         <p:sp>
           <p:nvSpPr>
@@ -7176,6 +7190,13 @@
               <a:schemeClr val="lt1"/>
             </a:fontRef>
           </p:style>
+          <p:txBody>
+            <a:bodyPr/>
+            <a:lstStyle/>
+            <a:p>
+              <a:endParaRPr lang="cs-CZ"/>
+            </a:p>
+          </p:txBody>
         </p:sp>
         <p:sp>
           <p:nvSpPr>
@@ -7240,6 +7261,13 @@
               <a:schemeClr val="lt1"/>
             </a:fontRef>
           </p:style>
+          <p:txBody>
+            <a:bodyPr/>
+            <a:lstStyle/>
+            <a:p>
+              <a:endParaRPr lang="cs-CZ"/>
+            </a:p>
+          </p:txBody>
         </p:sp>
         <p:sp>
           <p:nvSpPr>
@@ -7305,6 +7333,13 @@
               <a:schemeClr val="lt1"/>
             </a:fontRef>
           </p:style>
+          <p:txBody>
+            <a:bodyPr/>
+            <a:lstStyle/>
+            <a:p>
+              <a:endParaRPr lang="cs-CZ"/>
+            </a:p>
+          </p:txBody>
         </p:sp>
         <p:sp>
           <p:nvSpPr>
@@ -7368,6 +7403,13 @@
               <a:schemeClr val="lt1"/>
             </a:fontRef>
           </p:style>
+          <p:txBody>
+            <a:bodyPr/>
+            <a:lstStyle/>
+            <a:p>
+              <a:endParaRPr lang="cs-CZ"/>
+            </a:p>
+          </p:txBody>
         </p:sp>
         <p:sp>
           <p:nvSpPr>
@@ -7409,6 +7451,13 @@
               <a:schemeClr val="lt1"/>
             </a:fontRef>
           </p:style>
+          <p:txBody>
+            <a:bodyPr/>
+            <a:lstStyle/>
+            <a:p>
+              <a:endParaRPr lang="cs-CZ"/>
+            </a:p>
+          </p:txBody>
         </p:sp>
         <p:sp>
           <p:nvSpPr>
@@ -7450,6 +7499,13 @@
               <a:schemeClr val="lt1"/>
             </a:fontRef>
           </p:style>
+          <p:txBody>
+            <a:bodyPr/>
+            <a:lstStyle/>
+            <a:p>
+              <a:endParaRPr lang="cs-CZ"/>
+            </a:p>
+          </p:txBody>
         </p:sp>
       </p:grpSp>
       <p:sp>
@@ -7628,7 +7684,7 @@
             <a:fld id="{5586B75A-687E-405C-8A0B-8D00578BA2C3}" type="datetimeFigureOut">
               <a:rPr lang="en-US" smtClean="0"/>
               <a:pPr/>
-              <a:t>10/1/2023</a:t>
+              <a:t>10/14/2026</a:t>
             </a:fld>
             <a:endParaRPr lang="en-US" dirty="0"/>
           </a:p>
@@ -7881,7 +7937,7 @@
             <a:fld id="{5586B75A-687E-405C-8A0B-8D00578BA2C3}" type="datetimeFigureOut">
               <a:rPr lang="en-US" smtClean="0"/>
               <a:pPr/>
-              <a:t>10/1/2023</a:t>
+              <a:t>10/14/2026</a:t>
             </a:fld>
             <a:endParaRPr lang="en-US" dirty="0"/>
           </a:p>
@@ -8198,7 +8254,7 @@
             <a:fld id="{5586B75A-687E-405C-8A0B-8D00578BA2C3}" type="datetimeFigureOut">
               <a:rPr lang="en-US" smtClean="0"/>
               <a:pPr/>
-              <a:t>10/1/2023</a:t>
+              <a:t>10/14/2026</a:t>
             </a:fld>
             <a:endParaRPr lang="en-US" dirty="0"/>
           </a:p>
@@ -8528,7 +8584,7 @@
             <a:fld id="{5586B75A-687E-405C-8A0B-8D00578BA2C3}" type="datetimeFigureOut">
               <a:rPr lang="en-US" smtClean="0"/>
               <a:pPr/>
-              <a:t>10/1/2023</a:t>
+              <a:t>10/14/2026</a:t>
             </a:fld>
             <a:endParaRPr lang="en-US" dirty="0"/>
           </a:p>
@@ -8845,7 +8901,7 @@
             <a:fld id="{5586B75A-687E-405C-8A0B-8D00578BA2C3}" type="datetimeFigureOut">
               <a:rPr lang="en-US" smtClean="0"/>
               <a:pPr/>
-              <a:t>10/1/2023</a:t>
+              <a:t>10/14/2026</a:t>
             </a:fld>
             <a:endParaRPr lang="en-US" dirty="0"/>
           </a:p>
@@ -9235,7 +9291,7 @@
             <a:fld id="{5586B75A-687E-405C-8A0B-8D00578BA2C3}" type="datetimeFigureOut">
               <a:rPr lang="en-US" smtClean="0"/>
               <a:pPr/>
-              <a:t>10/1/2023</a:t>
+              <a:t>10/14/2026</a:t>
             </a:fld>
             <a:endParaRPr lang="en-US" dirty="0"/>
           </a:p>
@@ -9407,7 +9463,7 @@
           <a:p>
             <a:fld id="{5F4E5243-F52A-4D37-9694-EB26C6C31910}" type="datetimeFigureOut">
               <a:rPr lang="en-US" smtClean="0"/>
-              <a:t>10/1/2023</a:t>
+              <a:t>10/14/2026</a:t>
             </a:fld>
             <a:endParaRPr lang="en-US" dirty="0"/>
           </a:p>
@@ -9587,7 +9643,7 @@
           <a:p>
             <a:fld id="{3A77B6E1-634A-48DC-9E8B-D894023267EF}" type="datetimeFigureOut">
               <a:rPr lang="en-US" smtClean="0"/>
-              <a:t>10/1/2023</a:t>
+              <a:t>10/14/2026</a:t>
             </a:fld>
             <a:endParaRPr lang="en-US" dirty="0"/>
           </a:p>
@@ -9763,7 +9819,7 @@
           <a:p>
             <a:fld id="{7B2D3E9E-A95C-48F2-B4BF-A71542E0BE9A}" type="datetimeFigureOut">
               <a:rPr lang="en-US" smtClean="0"/>
-              <a:t>10/1/2023</a:t>
+              <a:t>10/14/2026</a:t>
             </a:fld>
             <a:endParaRPr lang="en-US" dirty="0"/>
           </a:p>
@@ -10011,7 +10067,7 @@
             <a:fld id="{5586B75A-687E-405C-8A0B-8D00578BA2C3}" type="datetimeFigureOut">
               <a:rPr lang="en-US" smtClean="0"/>
               <a:pPr/>
-              <a:t>10/1/2023</a:t>
+              <a:t>10/14/2026</a:t>
             </a:fld>
             <a:endParaRPr lang="en-US" dirty="0"/>
           </a:p>
@@ -10244,7 +10300,7 @@
           <a:p>
             <a:fld id="{F12952B5-7A2F-4CC8-B7CE-9234E21C2837}" type="datetimeFigureOut">
               <a:rPr lang="en-US" smtClean="0"/>
-              <a:t>10/1/2023</a:t>
+              <a:t>10/14/2026</a:t>
             </a:fld>
             <a:endParaRPr lang="en-US" dirty="0"/>
           </a:p>
@@ -10618,7 +10674,7 @@
           <a:p>
             <a:fld id="{CE1DA07A-9201-4B4B-BAF2-015AFA30F520}" type="datetimeFigureOut">
               <a:rPr lang="en-US" smtClean="0"/>
-              <a:t>10/1/2023</a:t>
+              <a:t>10/14/2026</a:t>
             </a:fld>
             <a:endParaRPr lang="en-US" dirty="0"/>
           </a:p>
@@ -10741,7 +10797,7 @@
           <a:p>
             <a:fld id="{73D7E00A-486F-4252-8B1D-E32645521F49}" type="datetimeFigureOut">
               <a:rPr lang="en-US" smtClean="0"/>
-              <a:t>10/1/2023</a:t>
+              <a:t>10/14/2026</a:t>
             </a:fld>
             <a:endParaRPr lang="en-US" dirty="0"/>
           </a:p>
@@ -10836,7 +10892,7 @@
           <a:p>
             <a:fld id="{8DDF5F92-E675-4B36-9A60-69A962A68675}" type="datetimeFigureOut">
               <a:rPr lang="en-US" smtClean="0"/>
-              <a:t>10/1/2023</a:t>
+              <a:t>10/14/2026</a:t>
             </a:fld>
             <a:endParaRPr lang="en-US" dirty="0"/>
           </a:p>
@@ -11091,7 +11147,7 @@
           <a:p>
             <a:fld id="{AF6E2C9B-5FA2-460D-9BE7-B0812FC2A6FF}" type="datetimeFigureOut">
               <a:rPr lang="en-US" smtClean="0"/>
-              <a:t>10/1/2023</a:t>
+              <a:t>10/14/2026</a:t>
             </a:fld>
             <a:endParaRPr lang="en-US" dirty="0"/>
           </a:p>
@@ -11356,7 +11412,7 @@
             <a:fld id="{5586B75A-687E-405C-8A0B-8D00578BA2C3}" type="datetimeFigureOut">
               <a:rPr lang="en-US" smtClean="0"/>
               <a:pPr/>
-              <a:t>10/1/2023</a:t>
+              <a:t>10/14/2026</a:t>
             </a:fld>
             <a:endParaRPr lang="en-US" dirty="0"/>
           </a:p>
@@ -11592,6 +11648,13 @@
               <a:schemeClr val="lt1"/>
             </a:fontRef>
           </p:style>
+          <p:txBody>
+            <a:bodyPr/>
+            <a:lstStyle/>
+            <a:p>
+              <a:endParaRPr lang="cs-CZ"/>
+            </a:p>
+          </p:txBody>
         </p:sp>
         <p:sp>
           <p:nvSpPr>
@@ -11655,6 +11718,13 @@
               <a:schemeClr val="lt1"/>
             </a:fontRef>
           </p:style>
+          <p:txBody>
+            <a:bodyPr/>
+            <a:lstStyle/>
+            <a:p>
+              <a:endParaRPr lang="cs-CZ"/>
+            </a:p>
+          </p:txBody>
         </p:sp>
         <p:sp>
           <p:nvSpPr>
@@ -11696,6 +11766,13 @@
               <a:schemeClr val="lt1"/>
             </a:fontRef>
           </p:style>
+          <p:txBody>
+            <a:bodyPr/>
+            <a:lstStyle/>
+            <a:p>
+              <a:endParaRPr lang="cs-CZ"/>
+            </a:p>
+          </p:txBody>
         </p:sp>
         <p:sp>
           <p:nvSpPr>
@@ -11760,6 +11837,13 @@
               <a:schemeClr val="lt1"/>
             </a:fontRef>
           </p:style>
+          <p:txBody>
+            <a:bodyPr/>
+            <a:lstStyle/>
+            <a:p>
+              <a:endParaRPr lang="cs-CZ"/>
+            </a:p>
+          </p:txBody>
         </p:sp>
         <p:sp>
           <p:nvSpPr>
@@ -11825,6 +11909,13 @@
               <a:schemeClr val="lt1"/>
             </a:fontRef>
           </p:style>
+          <p:txBody>
+            <a:bodyPr/>
+            <a:lstStyle/>
+            <a:p>
+              <a:endParaRPr lang="cs-CZ"/>
+            </a:p>
+          </p:txBody>
         </p:sp>
         <p:sp>
           <p:nvSpPr>
@@ -11888,6 +11979,13 @@
               <a:schemeClr val="lt1"/>
             </a:fontRef>
           </p:style>
+          <p:txBody>
+            <a:bodyPr/>
+            <a:lstStyle/>
+            <a:p>
+              <a:endParaRPr lang="cs-CZ"/>
+            </a:p>
+          </p:txBody>
         </p:sp>
         <p:sp>
           <p:nvSpPr>
@@ -11929,6 +12027,13 @@
               <a:schemeClr val="lt1"/>
             </a:fontRef>
           </p:style>
+          <p:txBody>
+            <a:bodyPr/>
+            <a:lstStyle/>
+            <a:p>
+              <a:endParaRPr lang="cs-CZ"/>
+            </a:p>
+          </p:txBody>
         </p:sp>
         <p:sp>
           <p:nvSpPr>
@@ -11970,6 +12075,13 @@
               <a:schemeClr val="lt1"/>
             </a:fontRef>
           </p:style>
+          <p:txBody>
+            <a:bodyPr/>
+            <a:lstStyle/>
+            <a:p>
+              <a:endParaRPr lang="cs-CZ"/>
+            </a:p>
+          </p:txBody>
         </p:sp>
       </p:grpSp>
       <p:sp>
@@ -12103,7 +12215,7 @@
             <a:fld id="{5586B75A-687E-405C-8A0B-8D00578BA2C3}" type="datetimeFigureOut">
               <a:rPr lang="en-US" smtClean="0"/>
               <a:pPr/>
-              <a:t>10/1/2023</a:t>
+              <a:t>10/14/2026</a:t>
             </a:fld>
             <a:endParaRPr lang="en-US" dirty="0"/>
           </a:p>
@@ -14201,7 +14313,7 @@
           <a:p>
             <a:r>
               <a:rPr lang="cs-CZ" dirty="0"/>
-              <a:t>Výukový server eso.vse.cz</a:t>
+              <a:t>Výukový server eso-2025.vse.cz</a:t>
             </a:r>
           </a:p>
         </p:txBody>
@@ -15189,7 +15301,7 @@
           <a:p>
             <a:r>
               <a:rPr lang="cs-CZ" dirty="0"/>
-              <a:t>Výukový server eso.vse.cz</a:t>
+              <a:t>Výukový server eso-2025.vse.cz</a:t>
             </a:r>
           </a:p>
         </p:txBody>
@@ -15267,7 +15379,7 @@
             <a:pPr lvl="1"/>
             <a:r>
               <a:rPr lang="cs-CZ" dirty="0"/>
-              <a:t>Adresa serveru:		eso.vse.cz</a:t>
+              <a:t>Adresa serveru:		eso-2025.vse.cz</a:t>
             </a:r>
           </a:p>
           <a:p>
@@ -15307,7 +15419,7 @@
               <a:rPr lang="cs-CZ" dirty="0">
                 <a:hlinkClick r:id="rId3"/>
               </a:rPr>
-              <a:t>https://eso.vse.cz/</a:t>
+              <a:t>https://eso-2025.vse.cz/</a:t>
             </a:r>
             <a:r>
               <a:rPr lang="en-US" dirty="0">
@@ -15381,7 +15493,7 @@
           <a:p>
             <a:r>
               <a:rPr lang="cs-CZ" dirty="0"/>
-              <a:t>Výukový server eso.vse.cz</a:t>
+              <a:t>Výukový server eso-2025.vse.cz</a:t>
             </a:r>
           </a:p>
         </p:txBody>
@@ -15413,23 +15525,7 @@
                   <a:srgbClr val="FFC000"/>
                 </a:solidFill>
               </a:rPr>
-              <a:t>Zkuste na server eso.vse.cz nahrát HTML soubor se sémantickými daty, </a:t>
-            </a:r>
-            <a:r>
-              <a:rPr lang="cs-CZ" i="1">
-                <a:solidFill>
-                  <a:srgbClr val="FFC000"/>
-                </a:solidFill>
-              </a:rPr>
-              <a:t>který jste </a:t>
-            </a:r>
-            <a:r>
-              <a:rPr lang="cs-CZ" i="1" dirty="0">
-                <a:solidFill>
-                  <a:srgbClr val="FFC000"/>
-                </a:solidFill>
-              </a:rPr>
-              <a:t>vytvářeli v praktickém příkladu na dnešní hodině.</a:t>
+              <a:t>Zkuste na server eso-2025.vse.cz nahrát HTML soubor se sémantickými daty, který jste vytvářeli v praktickém příkladu na dnešní hodině.</a:t>
             </a:r>
           </a:p>
           <a:p>
